--- a/curso/pptx/S41.pptx
+++ b/curso/pptx/S41.pptx
@@ -5227,7 +5227,7 @@
                 </a:solidFill>
                 <a:latin typeface="Nunito Sans"/>
               </a:rPr>
-              <a:t>«A mi primo le funcionó»</a:t>
+              <a:t>“我表哥用了有效”</a:t>
             </a:r>
           </a:p>
           <a:p>
@@ -5252,7 +5252,7 @@
                 </a:solidFill>
                 <a:latin typeface="Nunito Sans"/>
               </a:rPr>
-              <a:t>«Conozco a uno que…»</a:t>
+              <a:t>“我认识一个人……”</a:t>
             </a:r>
           </a:p>
           <a:p>
@@ -5277,7 +5277,7 @@
                 </a:solidFill>
                 <a:latin typeface="Nunito Sans"/>
               </a:rPr>
-              <a:t>Un vídeo viral de un solo caso</a:t>
+              <a:t>一段只讲一个例子的爆红视频</a:t>
             </a:r>
           </a:p>
         </p:txBody>
@@ -5407,7 +5407,7 @@
                 </a:solidFill>
                 <a:latin typeface="Nunito Sans"/>
               </a:rPr>
-              <a:t>Muchos casos contados bien</a:t>
+              <a:t>很多被好好统计的例子</a:t>
             </a:r>
           </a:p>
           <a:p>
@@ -5432,7 +5432,7 @@
                 </a:solidFill>
                 <a:latin typeface="Nunito Sans"/>
               </a:rPr>
-              <a:t>Comparar con un grupo que no lo hizo</a:t>
+              <a:t>和没这样做的一组进行比较</a:t>
             </a:r>
           </a:p>
           <a:p>
@@ -5457,7 +5457,7 @@
                 </a:solidFill>
                 <a:latin typeface="Nunito Sans"/>
               </a:rPr>
-              <a:t>Varios estudios que coinciden</a:t>
+              <a:t>好几项一致的研究</a:t>
             </a:r>
           </a:p>
         </p:txBody>
@@ -7603,7 +7603,7 @@
                 </a:solidFill>
                 <a:latin typeface="Nunito Sans"/>
               </a:rPr>
-              <a:t>Notas 4, 6 y 8 → (4+6+8) : 3 = 6</a:t>
+              <a:t>成绩4、6和8 → (4+6+8) : 3 = 6</a:t>
             </a:r>
           </a:p>
           <a:p>
@@ -7628,7 +7628,7 @@
                 </a:solidFill>
                 <a:latin typeface="Nunito Sans"/>
               </a:rPr>
-              <a:t>Resume muchos datos en un solo número</a:t>
+              <a:t>它把很多数据概括成一个数字</a:t>
             </a:r>
           </a:p>
           <a:p>
@@ -7653,7 +7653,7 @@
                 </a:solidFill>
                 <a:latin typeface="Nunito Sans"/>
               </a:rPr>
-              <a:t>Pero </a:t>
+              <a:t>但它</a:t>
             </a:r>
             <a:r>
               <a:rPr sz="2800" b="1">
@@ -7662,7 +7662,7 @@
                 </a:solidFill>
                 <a:latin typeface="Nunito Sans"/>
               </a:rPr>
-              <a:t>esconde</a:t>
+              <a:t>掩盖了</a:t>
             </a:r>
             <a:r>
               <a:rPr sz="2800" b="0">
@@ -7671,7 +7671,7 @@
                 </a:solidFill>
                 <a:latin typeface="Nunito Sans"/>
               </a:rPr>
-              <a:t> cómo son los datos por dentro</a:t>
+              <a:t>数据内部的样子</a:t>
             </a:r>
           </a:p>
           <a:p>
@@ -7690,31 +7690,22 @@
               <a:t>• </a:t>
             </a:r>
             <a:r>
+              <a:rPr sz="2800" b="1">
+                <a:solidFill>
+                  <a:srgbClr val="1F2A44"/>
+                </a:solidFill>
+                <a:latin typeface="Nunito Sans"/>
+              </a:rPr>
+              <a:t>中位数</a:t>
+            </a:r>
+            <a:r>
               <a:rPr sz="2800" b="0">
                 <a:solidFill>
                   <a:srgbClr val="1F2A44"/>
                 </a:solidFill>
                 <a:latin typeface="Nunito Sans"/>
               </a:rPr>
-              <a:t>La </a:t>
-            </a:r>
-            <a:r>
-              <a:rPr sz="2800" b="1">
-                <a:solidFill>
-                  <a:srgbClr val="1F2A44"/>
-                </a:solidFill>
-                <a:latin typeface="Nunito Sans"/>
-              </a:rPr>
-              <a:t>mediana</a:t>
-            </a:r>
-            <a:r>
-              <a:rPr sz="2800" b="0">
-                <a:solidFill>
-                  <a:srgbClr val="1F2A44"/>
-                </a:solidFill>
-                <a:latin typeface="Nunito Sans"/>
-              </a:rPr>
-              <a:t> es el dato del medio, ordenados de menor a mayor</a:t>
+              <a:t>是把数据从小到大排好之后，处在中间的那个数据</a:t>
             </a:r>
           </a:p>
         </p:txBody>
@@ -8351,7 +8342,7 @@
                 </a:solidFill>
                 <a:latin typeface="Nunito Sans"/>
               </a:rPr>
-              <a:t>«Mi abuelo fumó toda la vida y vivió 95 años»</a:t>
+              <a:t>“我爷爷抽了一辈子烟，活到了95岁”</a:t>
             </a:r>
           </a:p>
           <a:p>
@@ -8376,7 +8367,7 @@
                 </a:solidFill>
                 <a:latin typeface="Nunito Sans"/>
               </a:rPr>
-              <a:t>Un caso suelto </a:t>
+              <a:t>一个个别的例子</a:t>
             </a:r>
             <a:r>
               <a:rPr sz="2800" b="1">
@@ -8385,7 +8376,7 @@
                 </a:solidFill>
                 <a:latin typeface="Nunito Sans"/>
               </a:rPr>
-              <a:t>no dice</a:t>
+              <a:t>不能说明</a:t>
             </a:r>
             <a:r>
               <a:rPr sz="2800" b="0">
@@ -8394,7 +8385,7 @@
                 </a:solidFill>
                 <a:latin typeface="Nunito Sans"/>
               </a:rPr>
-              <a:t> cómo es la mayoría</a:t>
+              <a:t>大多数是什么样</a:t>
             </a:r>
           </a:p>
           <a:p>
@@ -8419,7 +8410,7 @@
                 </a:solidFill>
                 <a:latin typeface="Nunito Sans"/>
               </a:rPr>
-              <a:t>Los datos salen de </a:t>
+              <a:t>数据来自</a:t>
             </a:r>
             <a:r>
               <a:rPr sz="2800" b="1">
@@ -8428,7 +8419,7 @@
                 </a:solidFill>
                 <a:latin typeface="Nunito Sans"/>
               </a:rPr>
-              <a:t>muchos</a:t>
+              <a:t>很多</a:t>
             </a:r>
             <a:r>
               <a:rPr sz="2800" b="0">
@@ -8437,7 +8428,7 @@
                 </a:solidFill>
                 <a:latin typeface="Nunito Sans"/>
               </a:rPr>
-              <a:t> casos contados bien</a:t>
+              <a:t>被好好统计的例子</a:t>
             </a:r>
           </a:p>
         </p:txBody>

--- a/curso/pptx/S41.pptx
+++ b/curso/pptx/S41.pptx
@@ -4457,7 +4457,7 @@
                 </a:solidFill>
                 <a:latin typeface="Nunito Sans"/>
               </a:rPr>
-              <a:t>Aitor：“抽烟没那么糟糕。我爷爷抽了一辈子烟，活到了95岁。”</a:t>
+              <a:t>一个男孩：“抽烟没那么糟糕。我爷爷抽了一辈子烟，活到了95岁。”</a:t>
             </a:r>
           </a:p>
         </p:txBody>
@@ -4766,7 +4766,7 @@
                 </a:solidFill>
                 <a:latin typeface="Nunito Sans"/>
               </a:rPr>
-              <a:t>街区球队的教练说：“Kevin平均每场进一个球。”他们踢了10场比赛。（编造的例子。）</a:t>
+              <a:t>街区球队的教练说：“一个男孩平均每场进一个球。”他们踢了10场比赛。（编造的例子。）</a:t>
             </a:r>
           </a:p>
         </p:txBody>
@@ -5643,7 +5643,7 @@
                 </a:solidFill>
                 <a:latin typeface="Nunito Sans"/>
               </a:rPr>
-              <a:t>广告（编造的）：“戴上我们的头盔，你的头永远不会受伤。”Iker戴着这个头盔摔倒了，头受了伤。</a:t>
+              <a:t>广告（编造的）：“戴上我们的头盔，你的头永远不会受伤。”一个男孩戴着这个头盔摔倒了，头受了伤。</a:t>
             </a:r>
           </a:p>
         </p:txBody>
@@ -5784,7 +5784,7 @@
                 </a:solidFill>
                 <a:latin typeface="Nunito Sans"/>
               </a:rPr>
-              <a:t>如果Iker的事是真的，那么广告就是假的，即使这个头盔很能保护人。</a:t>
+              <a:t>如果这个男孩的事是真的，那么广告就是假的，即使这个头盔很能保护人。</a:t>
             </a:r>
           </a:p>
           <a:p>
